--- a/week 4/presentation.pptx
+++ b/week 4/presentation.pptx
@@ -9830,7 +9830,15 @@
             </a:r>
             <a:r>
               <a:rPr lang="en-US" sz="2400" dirty="0"/>
-              <a:t>Data was purposefully "dirty" (inconsistent phone formats, typos, orphan records). </a:t>
+              <a:t>Data </a:t>
+            </a:r>
+            <a:r>
+              <a:rPr lang="en-US" sz="2400"/>
+              <a:t>was "</a:t>
+            </a:r>
+            <a:r>
+              <a:rPr lang="en-US" sz="2400" dirty="0"/>
+              <a:t>dirty" (inconsistent phone formats, typos, orphan records). </a:t>
             </a:r>
             <a:r>
               <a:rPr lang="en-US" sz="2400" dirty="0">
